--- a/קורס בסיסי AI/שיעור 3/מצגת שיעור 3.pptx
+++ b/קורס בסיסי AI/שיעור 3/מצגת שיעור 3.pptx
@@ -3542,6 +3542,11 @@
           <a:p>
             <a:r>
               <a:t>ודבר רביעי, חשוב: רשמו משימה אחת שחוזרת אצלכם כל שבוע. בשבוע הבא נהפוך אותה לאוטומטית.</a:t>
+            </a:r>
+          </a:p>
+          <a:p>
+            <a:r>
+              <a:t>ולפני המפגש הבא: פותחים חשבון חינמי ב-Make, ומפעילים בג'מיני את Gmail, בהגדרות, תחת Apps. אשלח הודעה עם הקישורים.</a:t>
             </a:r>
           </a:p>
           <a:p>
@@ -28779,7 +28784,7 @@
                 <a:latin typeface="Arial"/>
                 <a:cs typeface="Arial"/>
               </a:rPr>
-              <a:t>📤  העלו את הערכה לאפליקציית הקורס. היא תהיה חלק מיום ההצגות בסוף הקורס.</a:t>
+              <a:t>📲  לפני המפגש הבא: פותחים חשבון ב-Make ומפעילים Gmail בג'מיני. הקישורים בחוברת ובהודעה.</a:t>
             </a:r>
           </a:p>
         </p:txBody>
